--- a/decks/triple-b5/triple-b5_ch2_pathogens.pptx
+++ b/decks/triple-b5/triple-b5_ch2_pathogens.pptx
@@ -125,30 +125,30 @@
   <p:extLst>
     <p:ext uri="{521415D9-36F7-43E2-AB2F-B90AF26B5E84}">
       <p14:sectionLst xmlns:p14="http://schemas.microsoft.com/office/powerpoint/2010/main">
-        <p14:section name="Opening" id="{c052f7ab-e121-cfed-2fb0-e84e0349aa94}">
+        <p14:section name="Opening" id="{20d201f6-e470-75a9-6b50-20b6f714df6f}">
           <p14:sldIdLst>
             <p14:sldId id="256"/>
           </p14:sldIdLst>
         </p14:section>
-        <p14:section name="Gate" id="{bbfc9332-da81-85a9-12aa-61af14c2ad2b}">
+        <p14:section name="Gate" id="{e44dc022-c26c-6e01-64cf-3b1e9f5edbb8}">
           <p14:sldIdLst>
             <p14:sldId id="257"/>
             <p14:sldId id="258"/>
           </p14:sldIdLst>
         </p14:section>
-        <p14:section name="Pre-teach" id="{ee0d32be-717a-3455-f825-05bd4be6ee80}">
+        <p14:section name="Pre-teach" id="{45eae73f-13f3-ea7a-7d46-c3c2a76db2c1}">
           <p14:sldIdLst>
             <p14:sldId id="259"/>
             <p14:sldId id="260"/>
           </p14:sldIdLst>
         </p14:section>
-        <p14:section name="Read-along" id="{a7171b27-5d2b-af5a-e0be-01c3c78d573c}">
+        <p14:section name="Read-along" id="{791a4e13-c8cc-b344-2a97-4b5c5ed70d18}">
           <p14:sldIdLst>
             <p14:sldId id="261"/>
             <p14:sldId id="262"/>
           </p14:sldIdLst>
         </p14:section>
-        <p14:section name="Teach" id="{937e49ed-1a86-c27f-f14a-30d6319e90bd}">
+        <p14:section name="Teach" id="{eefd82c3-6dea-721c-0a5f-c6ab38145343}">
           <p14:sldIdLst>
             <p14:sldId id="263"/>
             <p14:sldId id="264"/>
@@ -156,7 +156,7 @@
             <p14:sldId id="266"/>
           </p14:sldIdLst>
         </p14:section>
-        <p14:section name="Routes" id="{d13e071b-27c6-0bf5-a793-6ec80b711a1c}">
+        <p14:section name="Routes" id="{8a213825-0d7b-35b4-1558-294816d21f63}">
           <p14:sldIdLst>
             <p14:sldId id="267"/>
             <p14:sldId id="268"/>
@@ -164,12 +164,12 @@
             <p14:sldId id="270"/>
           </p14:sldIdLst>
         </p14:section>
-        <p14:section name="Close" id="{e9efe9d5-4f3a-c990-7498-db51ff0194c6}">
+        <p14:section name="Close" id="{f42b2e50-ca2d-54f4-8d3f-9ae3e2a49f02}">
           <p14:sldIdLst>
             <p14:sldId id="271"/>
           </p14:sldIdLst>
         </p14:section>
-        <p14:section name="Answers" id="{409c0657-9d7a-7dac-757c-8c3ee043098b}">
+        <p14:section name="Answers" id="{17a1b2db-03e8-0505-c219-7b1a24829187}">
           <p14:sldIdLst>
             <p14:sldId id="272"/>
             <p14:sldId id="273"/>
@@ -1597,9 +1597,9 @@
             <a:r>
               <a:rPr lang="en-US" dirty="0"/>
               <a:t>Do now — retrieval. Silent, no notes, no help: recall comes before any support. Give about four minutes.
-1. What is a pathogen?  →  A   A microorganism that causes disease
+1. What is a pathogen?  →  C   A microorganism that causes disease
 2. Bacteria make you feel ill by releasing ___ that damage your cells.  →  toxins
-3. Which statement about viruses is correct?  →  A   They can only reproduce inside living cells
+3. Which statement about viruses is correct?  →  C   They can only reproduce inside living cells
 Circulate: who gets 3/3 (Stretch route), 2/3 (Core), 0–1 (Support)? Use this to route pupils later in the lesson.</a:t>
             </a:r>
             <a:endParaRPr lang="en-US" dirty="0"/>
@@ -1689,9 +1689,9 @@
             <a:r>
               <a:rPr lang="en-US" dirty="0"/>
               <a:t>Answers — pupils mark their own in a different colour, then hands up for 3/3, 2/3, 1/3.
-1. A   A microorganism that causes disease. Pathogens are microorganisms that cause disease: bacteria, viruses, fungi and protists.
+1. C   A microorganism that causes disease. Pathogens are microorganisms that cause disease: bacteria, viruses, fungi and protists.
 2. toxins. Bacteria divide rapidly and produce toxins (poisons). Your body's response to the damage they cause gives you the symptoms.
-3. A   They can only reproduce inside living cells. Viruses take over living cells to make copies of themselves, which destroys the cells. They are far smaller than bacteria and need an electron microscope.
+3. C   They can only reproduce inside living cells. Viruses take over living cells to make copies of themselves, which destroys the cells. They are far smaller than bacteria and need an electron microscope.
 Say the route each score points to: 3/3 Stretch, 2/3 Core, 0–1 Support. Pupils may choose to move up.</a:t>
             </a:r>
             <a:endParaRPr lang="en-US" dirty="0"/>
@@ -9482,7 +9482,7 @@
                 <a:ea typeface="Calibri" pitchFamily="34" charset="-122"/>
                 <a:cs typeface="Calibri" pitchFamily="34" charset="-120"/>
               </a:rPr>
-              <a:t>In droplets that they breathed in</a:t>
+              <a:t>Through an insect bite</a:t>
             </a:r>
             <a:endParaRPr lang="en-US" sz="2400" dirty="0"/>
           </a:p>
@@ -9519,7 +9519,7 @@
                 <a:ea typeface="Calibri" pitchFamily="34" charset="-122"/>
                 <a:cs typeface="Calibri" pitchFamily="34" charset="-120"/>
               </a:rPr>
-              <a:t>Through an insect bite</a:t>
+              <a:t>By direct contact with another person's skin</a:t>
             </a:r>
             <a:endParaRPr lang="en-US" sz="2400" dirty="0"/>
           </a:p>
@@ -9556,7 +9556,7 @@
                 <a:ea typeface="Calibri" pitchFamily="34" charset="-122"/>
                 <a:cs typeface="Calibri" pitchFamily="34" charset="-120"/>
               </a:rPr>
-              <a:t>By direct contact with another person's skin</a:t>
+              <a:t>In droplets that they breathed in</a:t>
             </a:r>
             <a:endParaRPr lang="en-US" sz="2400" dirty="0"/>
           </a:p>
@@ -11672,7 +11672,7 @@
                 <a:ea typeface="Calibri" pitchFamily="34" charset="-122"/>
                 <a:cs typeface="Calibri" pitchFamily="34" charset="-120"/>
               </a:rPr>
-              <a:t>A microorganism that causes disease</a:t>
+              <a:t>An insect that carries disease</a:t>
             </a:r>
             <a:endParaRPr lang="en-US" sz="2400" dirty="0"/>
           </a:p>
@@ -11746,7 +11746,7 @@
                 <a:ea typeface="Calibri" pitchFamily="34" charset="-122"/>
                 <a:cs typeface="Calibri" pitchFamily="34" charset="-120"/>
               </a:rPr>
-              <a:t>A poison made by bacteria</a:t>
+              <a:t>A microorganism that causes disease</a:t>
             </a:r>
             <a:endParaRPr lang="en-US" sz="2400" dirty="0"/>
           </a:p>
@@ -11783,7 +11783,7 @@
                 <a:ea typeface="Calibri" pitchFamily="34" charset="-122"/>
                 <a:cs typeface="Calibri" pitchFamily="34" charset="-120"/>
               </a:rPr>
-              <a:t>An insect that carries disease</a:t>
+              <a:t>A poison made by bacteria</a:t>
             </a:r>
             <a:endParaRPr lang="en-US" sz="2400" dirty="0"/>
           </a:p>
@@ -12185,7 +12185,7 @@
                 <a:ea typeface="Calibri" pitchFamily="34" charset="-122"/>
                 <a:cs typeface="Calibri" pitchFamily="34" charset="-120"/>
               </a:rPr>
-              <a:t>They can only reproduce inside living cells</a:t>
+              <a:t>They make you ill by releasing toxins</a:t>
             </a:r>
             <a:endParaRPr lang="en-US" sz="1800" dirty="0"/>
           </a:p>
@@ -12222,7 +12222,7 @@
                 <a:ea typeface="Calibri" pitchFamily="34" charset="-122"/>
                 <a:cs typeface="Calibri" pitchFamily="34" charset="-120"/>
               </a:rPr>
-              <a:t>They are larger than bacteria</a:t>
+              <a:t>They can be seen with a school light microscope</a:t>
             </a:r>
             <a:endParaRPr lang="en-US" sz="1800" dirty="0"/>
           </a:p>
@@ -12259,7 +12259,7 @@
                 <a:ea typeface="Calibri" pitchFamily="34" charset="-122"/>
                 <a:cs typeface="Calibri" pitchFamily="34" charset="-120"/>
               </a:rPr>
-              <a:t>They make you ill by releasing toxins</a:t>
+              <a:t>They can only reproduce inside living cells</a:t>
             </a:r>
             <a:endParaRPr lang="en-US" sz="1800" dirty="0"/>
           </a:p>
@@ -12296,7 +12296,7 @@
                 <a:ea typeface="Calibri" pitchFamily="34" charset="-122"/>
                 <a:cs typeface="Calibri" pitchFamily="34" charset="-120"/>
               </a:rPr>
-              <a:t>They can be seen with a school light microscope</a:t>
+              <a:t>They are larger than bacteria</a:t>
             </a:r>
             <a:endParaRPr lang="en-US" sz="1800" dirty="0"/>
           </a:p>
@@ -12697,7 +12697,7 @@
                 <a:ea typeface="Calibri" pitchFamily="34" charset="-122"/>
                 <a:cs typeface="Calibri" pitchFamily="34" charset="-120"/>
               </a:rPr>
-              <a:t>A   A microorganism that causes disease</a:t>
+              <a:t>C   A microorganism that causes disease</a:t>
             </a:r>
             <a:endParaRPr lang="en-US" sz="2200" dirty="0"/>
           </a:p>
@@ -13197,7 +13197,7 @@
                 <a:ea typeface="Calibri" pitchFamily="34" charset="-122"/>
                 <a:cs typeface="Calibri" pitchFamily="34" charset="-120"/>
               </a:rPr>
-              <a:t>A   They can only reproduce inside living cells</a:t>
+              <a:t>C   They can only reproduce inside living cells</a:t>
             </a:r>
             <a:endParaRPr lang="en-US" sz="2200" dirty="0"/>
           </a:p>

--- a/decks/triple-b5/triple-b5_ch2_pathogens.pptx
+++ b/decks/triple-b5/triple-b5_ch2_pathogens.pptx
@@ -125,30 +125,30 @@
   <p:extLst>
     <p:ext uri="{521415D9-36F7-43E2-AB2F-B90AF26B5E84}">
       <p14:sectionLst xmlns:p14="http://schemas.microsoft.com/office/powerpoint/2010/main">
-        <p14:section name="Opening" id="{20d201f6-e470-75a9-6b50-20b6f714df6f}">
+        <p14:section name="Opening" id="{33c012dc-d786-da8b-02db-9baa339b0b2a}">
           <p14:sldIdLst>
             <p14:sldId id="256"/>
           </p14:sldIdLst>
         </p14:section>
-        <p14:section name="Gate" id="{e44dc022-c26c-6e01-64cf-3b1e9f5edbb8}">
+        <p14:section name="Gate" id="{cd70f750-75ea-57e9-eaa0-a92eb8e2bce9}">
           <p14:sldIdLst>
             <p14:sldId id="257"/>
             <p14:sldId id="258"/>
           </p14:sldIdLst>
         </p14:section>
-        <p14:section name="Pre-teach" id="{45eae73f-13f3-ea7a-7d46-c3c2a76db2c1}">
+        <p14:section name="Pre-teach" id="{2480b6cd-475b-7e12-e64e-9d825c18219a}">
           <p14:sldIdLst>
             <p14:sldId id="259"/>
             <p14:sldId id="260"/>
           </p14:sldIdLst>
         </p14:section>
-        <p14:section name="Read-along" id="{791a4e13-c8cc-b344-2a97-4b5c5ed70d18}">
+        <p14:section name="Read-along" id="{12db76fb-506d-6b9e-824b-a9596f937c9f}">
           <p14:sldIdLst>
             <p14:sldId id="261"/>
             <p14:sldId id="262"/>
           </p14:sldIdLst>
         </p14:section>
-        <p14:section name="Teach" id="{eefd82c3-6dea-721c-0a5f-c6ab38145343}">
+        <p14:section name="Teach" id="{1366f978-d1e8-d39c-2cc0-39eddf43cadd}">
           <p14:sldIdLst>
             <p14:sldId id="263"/>
             <p14:sldId id="264"/>
@@ -156,7 +156,7 @@
             <p14:sldId id="266"/>
           </p14:sldIdLst>
         </p14:section>
-        <p14:section name="Routes" id="{8a213825-0d7b-35b4-1558-294816d21f63}">
+        <p14:section name="Routes" id="{ded28284-42d1-7e41-db9b-6541a9cfdeb6}">
           <p14:sldIdLst>
             <p14:sldId id="267"/>
             <p14:sldId id="268"/>
@@ -164,12 +164,12 @@
             <p14:sldId id="270"/>
           </p14:sldIdLst>
         </p14:section>
-        <p14:section name="Close" id="{f42b2e50-ca2d-54f4-8d3f-9ae3e2a49f02}">
+        <p14:section name="Close" id="{10e539c9-9907-9c80-a1f7-3e39cf6d1d74}">
           <p14:sldIdLst>
             <p14:sldId id="271"/>
           </p14:sldIdLst>
         </p14:section>
-        <p14:section name="Answers" id="{17a1b2db-03e8-0505-c219-7b1a24829187}">
+        <p14:section name="Answers" id="{7a388b8b-6a77-1720-dcc4-b11e813774df}">
           <p14:sldIdLst>
             <p14:sldId id="272"/>
             <p14:sldId id="273"/>
